--- a/assets/powerpoints/module-n2-classe/A1-ouvrez-votre-cahier.pptx
+++ b/assets/powerpoints/module-n2-classe/A1-ouvrez-votre-cahier.pptx
@@ -12102,7 +12102,43 @@
                 </a:solidFill>
                 <a:latin typeface="Verdana"/>
               </a:rPr>
-              <a:t>On le dit &lt;b&gt;tout de suite&lt;/b&gt;, pas à la fin du cours. On commence par « &lt;b&gt;excusez-moi&lt;/b&gt; », puis on dit la phrase. L'enseignante répète : c'est son travail, et personne ne se fâche.</a:t>
+              <a:t>On le dit </a:t>
+            </a:r>
+            <a:r>
+              <a:rPr sz="2000" b="1" i="0">
+                <a:solidFill>
+                  <a:srgbClr val="4B4F52"/>
+                </a:solidFill>
+                <a:latin typeface="Verdana"/>
+              </a:rPr>
+              <a:t>tout de suite</a:t>
+            </a:r>
+            <a:r>
+              <a:rPr sz="2000" b="0" i="0">
+                <a:solidFill>
+                  <a:srgbClr val="4B4F52"/>
+                </a:solidFill>
+                <a:latin typeface="Verdana"/>
+              </a:rPr>
+              <a:t>, pas à la fin du cours. On commence par « </a:t>
+            </a:r>
+            <a:r>
+              <a:rPr sz="2000" b="1" i="0">
+                <a:solidFill>
+                  <a:srgbClr val="4B4F52"/>
+                </a:solidFill>
+                <a:latin typeface="Verdana"/>
+              </a:rPr>
+              <a:t>excusez-moi</a:t>
+            </a:r>
+            <a:r>
+              <a:rPr sz="2000" b="0" i="0">
+                <a:solidFill>
+                  <a:srgbClr val="4B4F52"/>
+                </a:solidFill>
+                <a:latin typeface="Verdana"/>
+              </a:rPr>
+              <a:t> », puis on dit la phrase. L'enseignante répète : c'est son travail, et personne ne se fâche.</a:t>
             </a:r>
           </a:p>
         </p:txBody>
